--- a/presentacion/botonazo.pptx
+++ b/presentacion/botonazo.pptx
@@ -5723,7 +5723,7 @@
                 </a:solidFill>
                 <a:latin typeface="Arial"/>
               </a:rPr>
-              <a:t>63 comprobaciones</a:t>
+              <a:t>64 comprobaciones</a:t>
             </a:r>
           </a:p>
         </p:txBody>
